--- a/make_presentation/templates/templates/premium/no_logo_4.pptx
+++ b/make_presentation/templates/templates/premium/no_logo_4.pptx
@@ -113,7 +113,13 @@
               <a:rPr b="0" lang="en-US" sz="2000" spc="-1" strike="noStrike">
                 <a:latin typeface="Arial"/>
               </a:rPr>
-              <a:t>Click to edit the notes format</a:t>
+              <a:t>Click to edit the notes </a:t>
+            </a:r>
+            <a:r>
+              <a:rPr b="0" lang="en-US" sz="2000" spc="-1" strike="noStrike">
+                <a:latin typeface="Arial"/>
+              </a:rPr>
+              <a:t>format</a:t>
             </a:r>
             <a:endParaRPr b="0" lang="en-US" sz="2000" spc="-1" strike="noStrike">
               <a:latin typeface="Arial"/>
@@ -298,7 +304,7 @@
             <a:pPr algn="r">
               <a:buNone/>
             </a:pPr>
-            <a:fld id="{B5680848-F875-4C1B-B914-95530846F41B}" type="slidenum">
+            <a:fld id="{590BE2B7-48DE-4CE7-9486-F237AE36BCE3}" type="slidenum">
               <a:rPr b="0" lang="en-US" sz="1400" spc="-1" strike="noStrike">
                 <a:latin typeface="Times New Roman"/>
               </a:rPr>
@@ -439,7 +445,7 @@
               </a:lnSpc>
               <a:buNone/>
             </a:pPr>
-            <a:fld id="{2FC4FEF1-E8DE-44C8-B922-8C239F97D9E7}" type="slidenum">
+            <a:fld id="{D03102C2-ADC2-4761-A98C-AFCB32F62B75}" type="slidenum">
               <a:rPr b="0" lang="en-US" sz="1800" spc="-1" strike="noStrike">
                 <a:solidFill>
                   <a:srgbClr val="000000"/>
@@ -583,7 +589,7 @@
               </a:lnSpc>
               <a:buNone/>
             </a:pPr>
-            <a:fld id="{EF2E8498-213E-4A20-953E-A169B058B1CB}" type="slidenum">
+            <a:fld id="{BB8732AA-EC10-430D-A6C2-82E9A7736F7A}" type="slidenum">
               <a:rPr b="0" lang="en-US" sz="1800" spc="-1" strike="noStrike">
                 <a:solidFill>
                   <a:srgbClr val="000000"/>
@@ -727,7 +733,7 @@
               </a:lnSpc>
               <a:buNone/>
             </a:pPr>
-            <a:fld id="{0109830F-FBD5-42D2-845B-BF440ADB2391}" type="slidenum">
+            <a:fld id="{F2D17CB8-2A99-4221-9EB3-45C65B562300}" type="slidenum">
               <a:rPr b="0" lang="en-US" sz="1800" spc="-1" strike="noStrike">
                 <a:solidFill>
                   <a:srgbClr val="000000"/>
@@ -871,7 +877,7 @@
               </a:lnSpc>
               <a:buNone/>
             </a:pPr>
-            <a:fld id="{37BB0FE8-24F2-49DD-83E9-746F65A61498}" type="slidenum">
+            <a:fld id="{D56F025E-0159-45D0-92B2-66AB56C6D614}" type="slidenum">
               <a:rPr b="0" lang="en-US" sz="1800" spc="-1" strike="noStrike">
                 <a:solidFill>
                   <a:srgbClr val="000000"/>
@@ -2914,7 +2920,7 @@
         <p:spPr>
           <a:xfrm>
             <a:off x="457200" y="4027680"/>
-            <a:ext cx="10515600" cy="2030760"/>
+            <a:ext cx="10928880" cy="2030760"/>
           </a:xfrm>
           <a:prstGeom prst="rect">
             <a:avLst/>
@@ -2945,7 +2951,7 @@
               </a:tabLst>
             </a:pPr>
             <a:r>
-              <a:rPr b="1" lang="en-US" sz="4000" spc="-1" strike="noStrike">
+              <a:rPr b="1" lang="en-US" sz="4800" spc="-1" strike="noStrike">
                 <a:solidFill>
                   <a:srgbClr val="ffffff"/>
                 </a:solidFill>
@@ -2954,7 +2960,7 @@
               </a:rPr>
               <a:t>TITLE</a:t>
             </a:r>
-            <a:endParaRPr b="0" lang="en-US" sz="4000" spc="-1" strike="noStrike">
+            <a:endParaRPr b="0" lang="en-US" sz="4800" spc="-1" strike="noStrike">
               <a:latin typeface="Arial"/>
             </a:endParaRPr>
           </a:p>
